--- a/docs/pptx/carbo/ritu-carbo-dose-overlay.pptx
+++ b/docs/pptx/carbo/ritu-carbo-dose-overlay.pptx
@@ -3320,8 +3320,8 @@
           </p:nvSpPr>
           <p:spPr>
             <a:xfrm>
-              <a:off x="2867235" y="4739793"/>
-              <a:ext cx="117036" cy="708257"/>
+              <a:off x="2867235" y="4975879"/>
+              <a:ext cx="117036" cy="472171"/>
             </a:xfrm>
             <a:prstGeom prst="rect">
               <a:avLst/>
@@ -4615,8 +4615,8 @@
           </p:nvSpPr>
           <p:spPr>
             <a:xfrm>
-              <a:off x="2516125" y="4739793"/>
-              <a:ext cx="117036" cy="708257"/>
+              <a:off x="2516125" y="4975879"/>
+              <a:ext cx="117036" cy="472171"/>
             </a:xfrm>
             <a:prstGeom prst="rect">
               <a:avLst/>
